--- a/Final_Report_V1/Project_Presentation.pptx
+++ b/Final_Report_V1/Project_Presentation.pptx
@@ -512,7 +512,7 @@
           <a:lstStyle/>
           <a:p>
             <a:r>
-              <a:t>Introduce the project as a teaching-simulator study of image brightness processing. Student name, ID and submission date are intentionally blank and must be entered before presenting. Explain that the presentation follows the supplied twelve-slide template. Separate recorded simulator results from workload estimates throughout.</a:t>
+              <a:t>Introduce the project as a teaching-simulator study of image brightness processing. The cover lists both team members with their student IDs; the submission date is still blank and should be filled before presenting. Explain that the presentation follows the supplied twelve-slide template. Separate recorded simulator results from workload estimates throughout.</a:t>
             </a:r>
           </a:p>
         </p:txBody>
@@ -1967,7 +1967,7 @@
       </p:sp>
       <p:sp>
         <p:nvSpPr>
-          <p:cNvPr id="5" name="Blank student fields"/>
+          <p:cNvPr id="5" name="Student fields"/>
           <p:cNvSpPr txBox="1"/>
           <p:nvPr/>
         </p:nvSpPr>
@@ -2005,7 +2005,7 @@
               </a:defRPr>
             </a:pPr>
             <a:r>
-              <a:t>Student Name:</a:t>
+              <a:t>Student Name: Khin Thant Zin / Wai Yan Min Thu</a:t>
             </a:r>
           </a:p>
           <a:p>
@@ -2027,7 +2027,7 @@
               </a:defRPr>
             </a:pPr>
             <a:r>
-              <a:t>Student ID:</a:t>
+              <a:t>Student ID: 2512220004 / 2512220006</a:t>
             </a:r>
           </a:p>
           <a:p>
